--- a/画图/E2E结果_小分子三联图.pptx
+++ b/画图/E2E结果_小分子三联图.pptx
@@ -666,7 +666,7 @@
             </a:r>
             <a:r>
               <a:rPr lang="en-US" altLang="zh-CN"/>
-              <a:t>local_cov-C </a:t>
+              <a:t>PocketXMol-tuned </a:t>
             </a:r>
             <a:r>
               <a:rPr lang="zh-CN" altLang="en-US"/>
